--- a/reference/archie/presentations/NPQG Fundamentals - Theory.pptx
+++ b/reference/archie/presentations/NPQG Fundamentals - Theory.pptx
@@ -1641,7 +1641,7 @@
 </file>
 
 <file path=ppt/slides/slide1.xml><?xml version="1.0" encoding="utf-8"?>
-<p:sld xmlns:a="http://schemas.openxmlformats.org/drawingml/2006/main" xmlns:r="http://schemas.openxmlformats.org/officeDocument/2006/relationships" xmlns:p="http://schemas.openxmlformats.org/presentationml/2006/main">
+<p:sld xmlns:a="http://schemas.openxmlformats.org/drawingml/2006/main" xmlns:a16="http://schemas.microsoft.com/office/drawing/2014/main" xmlns:ns3="http://schemas.microsoft.com/office/powerpoint/2010/main" xmlns:p="http://schemas.openxmlformats.org/presentationml/2006/main">
   <p:cSld>
     <p:bg>
       <p:bgPr>
@@ -1670,7 +1670,7 @@
           <p:cNvPr id="52" name="Up Arrow 51">
             <a:extLst>
               <a:ext uri="{FF2B5EF4-FFF2-40B4-BE49-F238E27FC236}">
-                <a16:creationId xmlns:a16="http://schemas.microsoft.com/office/drawing/2014/main" id="{F839F0C9-6284-BCA8-E2A3-16ACFF4B6F7C}"/>
+                <a16:creationId id="{F839F0C9-6284-BCA8-E2A3-16ACFF4B6F7C}"/>
               </a:ext>
             </a:extLst>
           </p:cNvPr>
@@ -1712,7 +1712,7 @@
           <p:cNvPr id="53" name="Up Arrow 52">
             <a:extLst>
               <a:ext uri="{FF2B5EF4-FFF2-40B4-BE49-F238E27FC236}">
-                <a16:creationId xmlns:a16="http://schemas.microsoft.com/office/drawing/2014/main" id="{F2080A39-764E-49E3-877A-7CDA212A553C}"/>
+                <a16:creationId id="{F2080A39-764E-49E3-877A-7CDA212A553C}"/>
               </a:ext>
             </a:extLst>
           </p:cNvPr>
@@ -1754,7 +1754,7 @@
           <p:cNvPr id="59" name="Up Arrow 58">
             <a:extLst>
               <a:ext uri="{FF2B5EF4-FFF2-40B4-BE49-F238E27FC236}">
-                <a16:creationId xmlns:a16="http://schemas.microsoft.com/office/drawing/2014/main" id="{938B2267-6C06-3B24-4083-CBAC500B25A6}"/>
+                <a16:creationId id="{938B2267-6C06-3B24-4083-CBAC500B25A6}"/>
               </a:ext>
             </a:extLst>
           </p:cNvPr>
@@ -1796,7 +1796,7 @@
           <p:cNvPr id="60" name="Up Arrow 59">
             <a:extLst>
               <a:ext uri="{FF2B5EF4-FFF2-40B4-BE49-F238E27FC236}">
-                <a16:creationId xmlns:a16="http://schemas.microsoft.com/office/drawing/2014/main" id="{CE852ACB-0A2E-94C3-6421-6EB851EC486B}"/>
+                <a16:creationId id="{CE852ACB-0A2E-94C3-6421-6EB851EC486B}"/>
               </a:ext>
             </a:extLst>
           </p:cNvPr>
@@ -1838,7 +1838,7 @@
           <p:cNvPr id="61" name="Up Arrow 60">
             <a:extLst>
               <a:ext uri="{FF2B5EF4-FFF2-40B4-BE49-F238E27FC236}">
-                <a16:creationId xmlns:a16="http://schemas.microsoft.com/office/drawing/2014/main" id="{7CD1F70A-B389-B9DB-1B88-B261C319DB97}"/>
+                <a16:creationId id="{7CD1F70A-B389-B9DB-1B88-B261C319DB97}"/>
               </a:ext>
             </a:extLst>
           </p:cNvPr>
@@ -1880,7 +1880,7 @@
           <p:cNvPr id="62" name="Up Arrow 61">
             <a:extLst>
               <a:ext uri="{FF2B5EF4-FFF2-40B4-BE49-F238E27FC236}">
-                <a16:creationId xmlns:a16="http://schemas.microsoft.com/office/drawing/2014/main" id="{DA0AE99E-792C-0888-F9A2-3FF6FE601CE3}"/>
+                <a16:creationId id="{DA0AE99E-792C-0888-F9A2-3FF6FE601CE3}"/>
               </a:ext>
             </a:extLst>
           </p:cNvPr>
@@ -1922,7 +1922,7 @@
           <p:cNvPr id="63" name="Up Arrow 62">
             <a:extLst>
               <a:ext uri="{FF2B5EF4-FFF2-40B4-BE49-F238E27FC236}">
-                <a16:creationId xmlns:a16="http://schemas.microsoft.com/office/drawing/2014/main" id="{DF45AE76-B29D-54B7-5401-1533B01D129B}"/>
+                <a16:creationId id="{DF45AE76-B29D-54B7-5401-1533B01D129B}"/>
               </a:ext>
             </a:extLst>
           </p:cNvPr>
@@ -1964,7 +1964,7 @@
           <p:cNvPr id="64" name="Up Arrow 63">
             <a:extLst>
               <a:ext uri="{FF2B5EF4-FFF2-40B4-BE49-F238E27FC236}">
-                <a16:creationId xmlns:a16="http://schemas.microsoft.com/office/drawing/2014/main" id="{E941D5DC-AEF8-C675-6BE0-97CC1A6A4AB4}"/>
+                <a16:creationId id="{E941D5DC-AEF8-C675-6BE0-97CC1A6A4AB4}"/>
               </a:ext>
             </a:extLst>
           </p:cNvPr>
@@ -2006,7 +2006,7 @@
           <p:cNvPr id="65" name="Up Arrow 64">
             <a:extLst>
               <a:ext uri="{FF2B5EF4-FFF2-40B4-BE49-F238E27FC236}">
-                <a16:creationId xmlns:a16="http://schemas.microsoft.com/office/drawing/2014/main" id="{DB77950B-113E-ACA4-D68E-57864F5CF4AB}"/>
+                <a16:creationId id="{DB77950B-113E-ACA4-D68E-57864F5CF4AB}"/>
               </a:ext>
             </a:extLst>
           </p:cNvPr>
@@ -2048,7 +2048,7 @@
           <p:cNvPr id="66" name="Up Arrow 65">
             <a:extLst>
               <a:ext uri="{FF2B5EF4-FFF2-40B4-BE49-F238E27FC236}">
-                <a16:creationId xmlns:a16="http://schemas.microsoft.com/office/drawing/2014/main" id="{12DF1B7E-11A0-4C97-4055-BC37336D4140}"/>
+                <a16:creationId id="{12DF1B7E-11A0-4C97-4055-BC37336D4140}"/>
               </a:ext>
             </a:extLst>
           </p:cNvPr>
@@ -2090,7 +2090,7 @@
           <p:cNvPr id="69" name="Up Arrow 68">
             <a:extLst>
               <a:ext uri="{FF2B5EF4-FFF2-40B4-BE49-F238E27FC236}">
-                <a16:creationId xmlns:a16="http://schemas.microsoft.com/office/drawing/2014/main" id="{E36DFDDB-10A6-1D91-8E99-9C135C4D39BE}"/>
+                <a16:creationId id="{E36DFDDB-10A6-1D91-8E99-9C135C4D39BE}"/>
               </a:ext>
             </a:extLst>
           </p:cNvPr>
@@ -2132,7 +2132,7 @@
           <p:cNvPr id="70" name="Up Arrow 69">
             <a:extLst>
               <a:ext uri="{FF2B5EF4-FFF2-40B4-BE49-F238E27FC236}">
-                <a16:creationId xmlns:a16="http://schemas.microsoft.com/office/drawing/2014/main" id="{053134EF-CC37-E431-798D-952315AEDC40}"/>
+                <a16:creationId id="{053134EF-CC37-E431-798D-952315AEDC40}"/>
               </a:ext>
             </a:extLst>
           </p:cNvPr>
@@ -2174,7 +2174,7 @@
           <p:cNvPr id="71" name="Up Arrow 70">
             <a:extLst>
               <a:ext uri="{FF2B5EF4-FFF2-40B4-BE49-F238E27FC236}">
-                <a16:creationId xmlns:a16="http://schemas.microsoft.com/office/drawing/2014/main" id="{BE36289C-3609-872C-DBC9-F6FC4A0D7F3E}"/>
+                <a16:creationId id="{BE36289C-3609-872C-DBC9-F6FC4A0D7F3E}"/>
               </a:ext>
             </a:extLst>
           </p:cNvPr>
@@ -2216,7 +2216,7 @@
           <p:cNvPr id="72" name="Up Arrow 71">
             <a:extLst>
               <a:ext uri="{FF2B5EF4-FFF2-40B4-BE49-F238E27FC236}">
-                <a16:creationId xmlns:a16="http://schemas.microsoft.com/office/drawing/2014/main" id="{2BDAEB0F-F50E-970E-3816-1A4A4D648211}"/>
+                <a16:creationId id="{2BDAEB0F-F50E-970E-3816-1A4A4D648211}"/>
               </a:ext>
             </a:extLst>
           </p:cNvPr>
@@ -2258,7 +2258,7 @@
           <p:cNvPr id="2" name="Title 1">
             <a:extLst>
               <a:ext uri="{FF2B5EF4-FFF2-40B4-BE49-F238E27FC236}">
-                <a16:creationId xmlns:a16="http://schemas.microsoft.com/office/drawing/2014/main" id="{487BE289-5149-2341-ADC9-D34AE0C1BC43}"/>
+                <a16:creationId id="{487BE289-5149-2341-ADC9-D34AE0C1BC43}"/>
               </a:ext>
             </a:extLst>
           </p:cNvPr>
@@ -2295,7 +2295,7 @@
           <p:cNvPr id="6" name="Rectangle 5">
             <a:extLst>
               <a:ext uri="{FF2B5EF4-FFF2-40B4-BE49-F238E27FC236}">
-                <a16:creationId xmlns:a16="http://schemas.microsoft.com/office/drawing/2014/main" id="{B5035AD8-9FFA-2D4C-9023-F51DFC93A72A}"/>
+                <a16:creationId id="{B5035AD8-9FFA-2D4C-9023-F51DFC93A72A}"/>
               </a:ext>
             </a:extLst>
           </p:cNvPr>
@@ -2369,7 +2369,7 @@
                 <a:ea typeface="+mn-ea"/>
                 <a:cs typeface="+mn-cs"/>
               </a:rPr>
-              <a:t>Constant Rate Point Potential Emitter/Receivers</a:t>
+              <a:t>Constant Rate Architrino Emitter/Receivers</a:t>
             </a:r>
           </a:p>
           <a:p>
@@ -2429,7 +2429,7 @@
           <p:cNvPr id="78" name="Rectangle 77">
             <a:extLst>
               <a:ext uri="{FF2B5EF4-FFF2-40B4-BE49-F238E27FC236}">
-                <a16:creationId xmlns:a16="http://schemas.microsoft.com/office/drawing/2014/main" id="{B1E98C6E-F698-1446-9892-A6321127047E}"/>
+                <a16:creationId id="{B1E98C6E-F698-1446-9892-A6321127047E}"/>
               </a:ext>
             </a:extLst>
           </p:cNvPr>
@@ -2513,7 +2513,7 @@
           <p:cNvPr id="100" name="Rectangle 99">
             <a:extLst>
               <a:ext uri="{FF2B5EF4-FFF2-40B4-BE49-F238E27FC236}">
-                <a16:creationId xmlns:a16="http://schemas.microsoft.com/office/drawing/2014/main" id="{FC232085-2DE4-AA45-AA60-CE3ADB492DDD}"/>
+                <a16:creationId id="{FC232085-2DE4-AA45-AA60-CE3ADB492DDD}"/>
               </a:ext>
             </a:extLst>
           </p:cNvPr>
@@ -2619,7 +2619,7 @@
           <p:cNvPr id="40" name="Rectangle 39">
             <a:extLst>
               <a:ext uri="{FF2B5EF4-FFF2-40B4-BE49-F238E27FC236}">
-                <a16:creationId xmlns:a16="http://schemas.microsoft.com/office/drawing/2014/main" id="{F217081D-0929-CE43-8C17-1C4EC84F6029}"/>
+                <a16:creationId id="{F217081D-0929-CE43-8C17-1C4EC84F6029}"/>
               </a:ext>
             </a:extLst>
           </p:cNvPr>
@@ -2858,7 +2858,7 @@
                 <a:ea typeface="+mn-ea"/>
                 <a:cs typeface="+mn-cs"/>
               </a:rPr>
-              <a:t>The primal assembly – the point potential binary. </a:t>
+              <a:t>The primal assembly – the architrino binary. </a:t>
             </a:r>
             <a:r>
               <a:rPr kumimoji="0" lang="en-US" sz="1100" i="0" u="none" strike="noStrike" kern="1200" cap="none" spc="0" normalizeH="0" baseline="0" noProof="0" dirty="0">
@@ -2955,7 +2955,7 @@
           <p:cNvPr id="110" name="Rectangle 109">
             <a:extLst>
               <a:ext uri="{FF2B5EF4-FFF2-40B4-BE49-F238E27FC236}">
-                <a16:creationId xmlns:a16="http://schemas.microsoft.com/office/drawing/2014/main" id="{3BEB294C-B0D4-E040-B2C8-A3F58F5311E6}"/>
+                <a16:creationId id="{3BEB294C-B0D4-E040-B2C8-A3F58F5311E6}"/>
               </a:ext>
             </a:extLst>
           </p:cNvPr>
@@ -3116,7 +3116,7 @@
           <p:cNvPr id="264" name="Rectangle 263">
             <a:extLst>
               <a:ext uri="{FF2B5EF4-FFF2-40B4-BE49-F238E27FC236}">
-                <a16:creationId xmlns:a16="http://schemas.microsoft.com/office/drawing/2014/main" id="{F62A056D-322A-FB4F-93A6-CD548076E030}"/>
+                <a16:creationId id="{F62A056D-322A-FB4F-93A6-CD548076E030}"/>
               </a:ext>
             </a:extLst>
           </p:cNvPr>
@@ -3200,7 +3200,7 @@
           <p:cNvPr id="54" name="Rectangle 53">
             <a:extLst>
               <a:ext uri="{FF2B5EF4-FFF2-40B4-BE49-F238E27FC236}">
-                <a16:creationId xmlns:a16="http://schemas.microsoft.com/office/drawing/2014/main" id="{D8A03304-6F06-F34D-8508-948339414BE2}"/>
+                <a16:creationId id="{D8A03304-6F06-F34D-8508-948339414BE2}"/>
               </a:ext>
             </a:extLst>
           </p:cNvPr>
@@ -3318,7 +3318,7 @@
           <p:cNvPr id="4" name="Footer Placeholder 3">
             <a:extLst>
               <a:ext uri="{FF2B5EF4-FFF2-40B4-BE49-F238E27FC236}">
-                <a16:creationId xmlns:a16="http://schemas.microsoft.com/office/drawing/2014/main" id="{812DD2A3-E03C-5147-A4DE-A04DD21FB527}"/>
+                <a16:creationId id="{812DD2A3-E03C-5147-A4DE-A04DD21FB527}"/>
               </a:ext>
             </a:extLst>
           </p:cNvPr>
@@ -3383,7 +3383,7 @@
           <p:cNvPr id="16" name="Rectangle 15">
             <a:extLst>
               <a:ext uri="{FF2B5EF4-FFF2-40B4-BE49-F238E27FC236}">
-                <a16:creationId xmlns:a16="http://schemas.microsoft.com/office/drawing/2014/main" id="{7BA07A55-5016-DDBA-160A-91A4F9964C5B}"/>
+                <a16:creationId id="{7BA07A55-5016-DDBA-160A-91A4F9964C5B}"/>
               </a:ext>
             </a:extLst>
           </p:cNvPr>
@@ -3523,7 +3523,7 @@
           <p:cNvPr id="34" name="Rectangle 33">
             <a:extLst>
               <a:ext uri="{FF2B5EF4-FFF2-40B4-BE49-F238E27FC236}">
-                <a16:creationId xmlns:a16="http://schemas.microsoft.com/office/drawing/2014/main" id="{167CF72F-1E4D-E0EB-1190-3C40B426524C}"/>
+                <a16:creationId id="{167CF72F-1E4D-E0EB-1190-3C40B426524C}"/>
               </a:ext>
             </a:extLst>
           </p:cNvPr>
@@ -3625,7 +3625,7 @@
                 <a:ea typeface="+mn-ea"/>
                 <a:cs typeface="+mn-cs"/>
               </a:rPr>
-              <a:t>Point potential emission rate.</a:t>
+              <a:t>Architrino emission rate.</a:t>
             </a:r>
           </a:p>
           <a:p>
@@ -3686,7 +3686,7 @@
           <p:cNvPr id="46" name="Rectangle 45">
             <a:extLst>
               <a:ext uri="{FF2B5EF4-FFF2-40B4-BE49-F238E27FC236}">
-                <a16:creationId xmlns:a16="http://schemas.microsoft.com/office/drawing/2014/main" id="{E3F3F07C-7187-5935-5241-E2C00F797995}"/>
+                <a16:creationId id="{E3F3F07C-7187-5935-5241-E2C00F797995}"/>
               </a:ext>
             </a:extLst>
           </p:cNvPr>
@@ -3788,7 +3788,7 @@
                 <a:ea typeface="+mn-ea"/>
                 <a:cs typeface="+mn-cs"/>
               </a:rPr>
-              <a:t>Large scale density of point potentials.</a:t>
+              <a:t>Large scale density of architrinos.</a:t>
             </a:r>
           </a:p>
           <a:p>
@@ -3832,7 +3832,7 @@
           <p:cNvPr id="47" name="Rectangle 46">
             <a:extLst>
               <a:ext uri="{FF2B5EF4-FFF2-40B4-BE49-F238E27FC236}">
-                <a16:creationId xmlns:a16="http://schemas.microsoft.com/office/drawing/2014/main" id="{361B3C8C-E97A-39BD-A1DF-DCADE2C7A95C}"/>
+                <a16:creationId id="{361B3C8C-E97A-39BD-A1DF-DCADE2C7A95C}"/>
               </a:ext>
             </a:extLst>
           </p:cNvPr>
@@ -3902,7 +3902,7 @@
           <p:cNvPr id="48" name="Rectangle 47">
             <a:extLst>
               <a:ext uri="{FF2B5EF4-FFF2-40B4-BE49-F238E27FC236}">
-                <a16:creationId xmlns:a16="http://schemas.microsoft.com/office/drawing/2014/main" id="{94AD58AA-8F4E-CCB3-3F18-E3A7DDC179A8}"/>
+                <a16:creationId id="{94AD58AA-8F4E-CCB3-3F18-E3A7DDC179A8}"/>
               </a:ext>
             </a:extLst>
           </p:cNvPr>
@@ -3986,7 +3986,7 @@
           <p:cNvPr id="50" name="Rectangle 49">
             <a:extLst>
               <a:ext uri="{FF2B5EF4-FFF2-40B4-BE49-F238E27FC236}">
-                <a16:creationId xmlns:a16="http://schemas.microsoft.com/office/drawing/2014/main" id="{B9AD77FF-C1C7-FC02-C199-BC4057AC8A95}"/>
+                <a16:creationId id="{B9AD77FF-C1C7-FC02-C199-BC4057AC8A95}"/>
               </a:ext>
             </a:extLst>
           </p:cNvPr>
@@ -4112,7 +4112,7 @@
           <p:cNvPr id="74" name="Elbow Connector 73">
             <a:extLst>
               <a:ext uri="{FF2B5EF4-FFF2-40B4-BE49-F238E27FC236}">
-                <a16:creationId xmlns:a16="http://schemas.microsoft.com/office/drawing/2014/main" id="{AC7FFE8B-312D-ED33-233F-687B99BA859B}"/>
+                <a16:creationId id="{AC7FFE8B-312D-ED33-233F-687B99BA859B}"/>
               </a:ext>
             </a:extLst>
           </p:cNvPr>
@@ -4155,10 +4155,166 @@
           </a:fontRef>
         </p:style>
       </p:cxnSp>
+      <p:sp>
+        <p:nvSpPr>
+          <p:cNvPr id="3" name="Footer Placeholder 3"/>
+          <p:cNvSpPr txBox="1">
+            <a:spLocks/>
+          </p:cNvSpPr>
+          <p:nvPr/>
+        </p:nvSpPr>
+        <p:spPr>
+          <a:xfrm>
+            <a:off x="10942204" y="6481737"/>
+            <a:ext cx="1217443" cy="365125"/>
+          </a:xfrm>
+          <a:prstGeom prst="rect">
+            <a:avLst/>
+          </a:prstGeom>
+        </p:spPr>
+        <p:txBody>
+          <a:bodyPr vert="horz" lIns="91440" tIns="45720" rIns="91440" bIns="45720" rtlCol="0" anchor="ctr"/>
+          <a:lstStyle>
+            <a:defPPr>
+              <a:defRPr lang="en-US"/>
+            </a:defPPr>
+            <a:lvl1pPr marL="0" algn="ctr" defTabSz="914400" rtl="0" eaLnBrk="1" latinLnBrk="0" hangingPunct="1">
+              <a:defRPr sz="1200" kern="1200">
+                <a:solidFill>
+                  <a:schemeClr val="tx1">
+                    <a:tint val="75000"/>
+                  </a:schemeClr>
+                </a:solidFill>
+                <a:latin typeface="+mn-lt"/>
+                <a:ea typeface="+mn-ea"/>
+                <a:cs typeface="+mn-cs"/>
+              </a:defRPr>
+            </a:lvl1pPr>
+            <a:lvl2pPr marL="457200" algn="l" defTabSz="914400" rtl="0" eaLnBrk="1" latinLnBrk="0" hangingPunct="1">
+              <a:defRPr sz="1800" kern="1200">
+                <a:solidFill>
+                  <a:schemeClr val="tx1"/>
+                </a:solidFill>
+                <a:latin typeface="+mn-lt"/>
+                <a:ea typeface="+mn-ea"/>
+                <a:cs typeface="+mn-cs"/>
+              </a:defRPr>
+            </a:lvl2pPr>
+            <a:lvl3pPr marL="914400" algn="l" defTabSz="914400" rtl="0" eaLnBrk="1" latinLnBrk="0" hangingPunct="1">
+              <a:defRPr sz="1800" kern="1200">
+                <a:solidFill>
+                  <a:schemeClr val="tx1"/>
+                </a:solidFill>
+                <a:latin typeface="+mn-lt"/>
+                <a:ea typeface="+mn-ea"/>
+                <a:cs typeface="+mn-cs"/>
+              </a:defRPr>
+            </a:lvl3pPr>
+            <a:lvl4pPr marL="1371600" algn="l" defTabSz="914400" rtl="0" eaLnBrk="1" latinLnBrk="0" hangingPunct="1">
+              <a:defRPr sz="1800" kern="1200">
+                <a:solidFill>
+                  <a:schemeClr val="tx1"/>
+                </a:solidFill>
+                <a:latin typeface="+mn-lt"/>
+                <a:ea typeface="+mn-ea"/>
+                <a:cs typeface="+mn-cs"/>
+              </a:defRPr>
+            </a:lvl4pPr>
+            <a:lvl5pPr marL="1828800" algn="l" defTabSz="914400" rtl="0" eaLnBrk="1" latinLnBrk="0" hangingPunct="1">
+              <a:defRPr sz="1800" kern="1200">
+                <a:solidFill>
+                  <a:schemeClr val="tx1"/>
+                </a:solidFill>
+                <a:latin typeface="+mn-lt"/>
+                <a:ea typeface="+mn-ea"/>
+                <a:cs typeface="+mn-cs"/>
+              </a:defRPr>
+            </a:lvl5pPr>
+            <a:lvl6pPr marL="2286000" algn="l" defTabSz="914400" rtl="0" eaLnBrk="1" latinLnBrk="0" hangingPunct="1">
+              <a:defRPr sz="1800" kern="1200">
+                <a:solidFill>
+                  <a:schemeClr val="tx1"/>
+                </a:solidFill>
+                <a:latin typeface="+mn-lt"/>
+                <a:ea typeface="+mn-ea"/>
+                <a:cs typeface="+mn-cs"/>
+              </a:defRPr>
+            </a:lvl6pPr>
+            <a:lvl7pPr marL="2743200" algn="l" defTabSz="914400" rtl="0" eaLnBrk="1" latinLnBrk="0" hangingPunct="1">
+              <a:defRPr sz="1800" kern="1200">
+                <a:solidFill>
+                  <a:schemeClr val="tx1"/>
+                </a:solidFill>
+                <a:latin typeface="+mn-lt"/>
+                <a:ea typeface="+mn-ea"/>
+                <a:cs typeface="+mn-cs"/>
+              </a:defRPr>
+            </a:lvl7pPr>
+            <a:lvl8pPr marL="3200400" algn="l" defTabSz="914400" rtl="0" eaLnBrk="1" latinLnBrk="0" hangingPunct="1">
+              <a:defRPr sz="1800" kern="1200">
+                <a:solidFill>
+                  <a:schemeClr val="tx1"/>
+                </a:solidFill>
+                <a:latin typeface="+mn-lt"/>
+                <a:ea typeface="+mn-ea"/>
+                <a:cs typeface="+mn-cs"/>
+              </a:defRPr>
+            </a:lvl8pPr>
+            <a:lvl9pPr marL="3657600" algn="l" defTabSz="914400" rtl="0" eaLnBrk="1" latinLnBrk="0" hangingPunct="1">
+              <a:defRPr sz="1800" kern="1200">
+                <a:solidFill>
+                  <a:schemeClr val="tx1"/>
+                </a:solidFill>
+                <a:latin typeface="+mn-lt"/>
+                <a:ea typeface="+mn-ea"/>
+                <a:cs typeface="+mn-cs"/>
+              </a:defRPr>
+            </a:lvl9pPr>
+          </a:lstStyle>
+          <a:p>
+            <a:pPr marL="0" marR="0" lvl="0" indent="0" algn="ctr" defTabSz="914400" rtl="0" eaLnBrk="1" fontAlgn="auto" latinLnBrk="0" hangingPunct="1">
+              <a:lnSpc>
+                <a:spcPct val="100000"/>
+              </a:lnSpc>
+              <a:spcBef>
+                <a:spcPts val="0"/>
+              </a:spcBef>
+              <a:spcAft>
+                <a:spcPts val="0"/>
+              </a:spcAft>
+              <a:buClrTx/>
+              <a:buSzTx/>
+              <a:buFontTx/>
+              <a:buNone/>
+              <a:tabLst/>
+              <a:defRPr/>
+            </a:pPr>
+            <a:r>
+              <a:rPr kumimoji="0" lang="en-US" sz="1200" b="0" i="0" u="none" strike="noStrike" kern="1200" cap="none" spc="0" normalizeH="0" baseline="0" noProof="0" dirty="0">
+                <a:ln>
+                  <a:noFill/>
+                </a:ln>
+                <a:solidFill>
+                  <a:prstClr val="black">
+                    <a:tint val="75000"/>
+                  </a:prstClr>
+                </a:solidFill>
+                <a:effectLst/>
+                <a:uLnTx/>
+                <a:uFillTx/>
+                <a:latin typeface="Helvetica Neue" panose="02000503000000020004" pitchFamily="2" charset="0"/>
+                <a:ea typeface="Helvetica Neue" panose="02000503000000020004" pitchFamily="2" charset="0"/>
+                <a:cs typeface="Helvetica Neue" panose="02000503000000020004" pitchFamily="2" charset="0"/>
+              </a:rPr>
+              <a:t>architrino.com</a:t>
+            </a:r>
+          </a:p>
+        </p:txBody>
+      </p:sp>
     </p:spTree>
     <p:extLst>
       <p:ext uri="{BB962C8B-B14F-4D97-AF65-F5344CB8AC3E}">
-        <p14:creationId xmlns:p14="http://schemas.microsoft.com/office/powerpoint/2010/main" val="3299661133"/>
+        <ns3:creationId val="3299661133"/>
       </p:ext>
     </p:extLst>
   </p:cSld>
